--- a/manuscript/Dataset_8_PDGF_signaling_slows_ovarian_cancer GSM7019822_GSM7019823_GSM7019824/new_analysis/Presentation.pptx
+++ b/manuscript/Dataset_8_PDGF_signaling_slows_ovarian_cancer GSM7019822_GSM7019823_GSM7019824/new_analysis/Presentation.pptx
@@ -6,6 +6,8 @@
   </p:sldMasterIdLst>
   <p:sldIdLst>
     <p:sldId id="267" r:id="rId2"/>
+    <p:sldId id="268" r:id="rId3"/>
+    <p:sldId id="269" r:id="rId4"/>
   </p:sldIdLst>
   <p:sldSz cx="12192000" cy="6858000"/>
   <p:notesSz cx="6858000" cy="9144000"/>
@@ -259,7 +261,7 @@
           <a:p>
             <a:fld id="{31268FC7-285F-4E3C-9BC4-CF17A7AA4125}" type="datetimeFigureOut">
               <a:rPr lang="en-US" smtClean="0"/>
-              <a:t>7/11/2025</a:t>
+              <a:t>8/4/2025</a:t>
             </a:fld>
             <a:endParaRPr lang="en-US"/>
           </a:p>
@@ -457,7 +459,7 @@
           <a:p>
             <a:fld id="{31268FC7-285F-4E3C-9BC4-CF17A7AA4125}" type="datetimeFigureOut">
               <a:rPr lang="en-US" smtClean="0"/>
-              <a:t>7/11/2025</a:t>
+              <a:t>8/4/2025</a:t>
             </a:fld>
             <a:endParaRPr lang="en-US"/>
           </a:p>
@@ -665,7 +667,7 @@
           <a:p>
             <a:fld id="{31268FC7-285F-4E3C-9BC4-CF17A7AA4125}" type="datetimeFigureOut">
               <a:rPr lang="en-US" smtClean="0"/>
-              <a:t>7/11/2025</a:t>
+              <a:t>8/4/2025</a:t>
             </a:fld>
             <a:endParaRPr lang="en-US"/>
           </a:p>
@@ -863,7 +865,7 @@
           <a:p>
             <a:fld id="{31268FC7-285F-4E3C-9BC4-CF17A7AA4125}" type="datetimeFigureOut">
               <a:rPr lang="en-US" smtClean="0"/>
-              <a:t>7/11/2025</a:t>
+              <a:t>8/4/2025</a:t>
             </a:fld>
             <a:endParaRPr lang="en-US"/>
           </a:p>
@@ -1138,7 +1140,7 @@
           <a:p>
             <a:fld id="{31268FC7-285F-4E3C-9BC4-CF17A7AA4125}" type="datetimeFigureOut">
               <a:rPr lang="en-US" smtClean="0"/>
-              <a:t>7/11/2025</a:t>
+              <a:t>8/4/2025</a:t>
             </a:fld>
             <a:endParaRPr lang="en-US"/>
           </a:p>
@@ -1403,7 +1405,7 @@
           <a:p>
             <a:fld id="{31268FC7-285F-4E3C-9BC4-CF17A7AA4125}" type="datetimeFigureOut">
               <a:rPr lang="en-US" smtClean="0"/>
-              <a:t>7/11/2025</a:t>
+              <a:t>8/4/2025</a:t>
             </a:fld>
             <a:endParaRPr lang="en-US"/>
           </a:p>
@@ -1815,7 +1817,7 @@
           <a:p>
             <a:fld id="{31268FC7-285F-4E3C-9BC4-CF17A7AA4125}" type="datetimeFigureOut">
               <a:rPr lang="en-US" smtClean="0"/>
-              <a:t>7/11/2025</a:t>
+              <a:t>8/4/2025</a:t>
             </a:fld>
             <a:endParaRPr lang="en-US"/>
           </a:p>
@@ -1956,7 +1958,7 @@
           <a:p>
             <a:fld id="{31268FC7-285F-4E3C-9BC4-CF17A7AA4125}" type="datetimeFigureOut">
               <a:rPr lang="en-US" smtClean="0"/>
-              <a:t>7/11/2025</a:t>
+              <a:t>8/4/2025</a:t>
             </a:fld>
             <a:endParaRPr lang="en-US"/>
           </a:p>
@@ -2069,7 +2071,7 @@
           <a:p>
             <a:fld id="{31268FC7-285F-4E3C-9BC4-CF17A7AA4125}" type="datetimeFigureOut">
               <a:rPr lang="en-US" smtClean="0"/>
-              <a:t>7/11/2025</a:t>
+              <a:t>8/4/2025</a:t>
             </a:fld>
             <a:endParaRPr lang="en-US"/>
           </a:p>
@@ -2380,7 +2382,7 @@
           <a:p>
             <a:fld id="{31268FC7-285F-4E3C-9BC4-CF17A7AA4125}" type="datetimeFigureOut">
               <a:rPr lang="en-US" smtClean="0"/>
-              <a:t>7/11/2025</a:t>
+              <a:t>8/4/2025</a:t>
             </a:fld>
             <a:endParaRPr lang="en-US"/>
           </a:p>
@@ -2668,7 +2670,7 @@
           <a:p>
             <a:fld id="{31268FC7-285F-4E3C-9BC4-CF17A7AA4125}" type="datetimeFigureOut">
               <a:rPr lang="en-US" smtClean="0"/>
-              <a:t>7/11/2025</a:t>
+              <a:t>8/4/2025</a:t>
             </a:fld>
             <a:endParaRPr lang="en-US"/>
           </a:p>
@@ -2909,7 +2911,7 @@
           <a:p>
             <a:fld id="{31268FC7-285F-4E3C-9BC4-CF17A7AA4125}" type="datetimeFigureOut">
               <a:rPr lang="en-US" smtClean="0"/>
-              <a:t>7/11/2025</a:t>
+              <a:t>8/4/2025</a:t>
             </a:fld>
             <a:endParaRPr lang="en-US"/>
           </a:p>
@@ -3383,6 +3385,210 @@
 </p:sld>
 </file>
 
+<file path=ppt/slides/slide2.xml><?xml version="1.0" encoding="utf-8"?>
+<p:sld xmlns:a="http://schemas.openxmlformats.org/drawingml/2006/main" xmlns:r="http://schemas.openxmlformats.org/officeDocument/2006/relationships" xmlns:p="http://schemas.openxmlformats.org/presentationml/2006/main">
+  <p:cSld>
+    <p:spTree>
+      <p:nvGrpSpPr>
+        <p:cNvPr id="1" name=""/>
+        <p:cNvGrpSpPr/>
+        <p:nvPr/>
+      </p:nvGrpSpPr>
+      <p:grpSpPr>
+        <a:xfrm>
+          <a:off x="0" y="0"/>
+          <a:ext cx="0" cy="0"/>
+          <a:chOff x="0" y="0"/>
+          <a:chExt cx="0" cy="0"/>
+        </a:xfrm>
+      </p:grpSpPr>
+      <p:sp>
+        <p:nvSpPr>
+          <p:cNvPr id="2" name="Title 1">
+            <a:extLst>
+              <a:ext uri="{FF2B5EF4-FFF2-40B4-BE49-F238E27FC236}">
+                <a16:creationId xmlns:a16="http://schemas.microsoft.com/office/drawing/2014/main" id="{DBE13742-0456-7E92-6E69-816E623120EB}"/>
+              </a:ext>
+            </a:extLst>
+          </p:cNvPr>
+          <p:cNvSpPr>
+            <a:spLocks noGrp="1"/>
+          </p:cNvSpPr>
+          <p:nvPr>
+            <p:ph type="title"/>
+          </p:nvPr>
+        </p:nvSpPr>
+        <p:spPr/>
+        <p:txBody>
+          <a:bodyPr/>
+          <a:lstStyle/>
+          <a:p>
+            <a:endParaRPr lang="en-US"/>
+          </a:p>
+        </p:txBody>
+      </p:sp>
+      <p:sp>
+        <p:nvSpPr>
+          <p:cNvPr id="3" name="Content Placeholder 2">
+            <a:extLst>
+              <a:ext uri="{FF2B5EF4-FFF2-40B4-BE49-F238E27FC236}">
+                <a16:creationId xmlns:a16="http://schemas.microsoft.com/office/drawing/2014/main" id="{C55F34B4-02B5-77A1-B7EE-60790B9C3D10}"/>
+              </a:ext>
+            </a:extLst>
+          </p:cNvPr>
+          <p:cNvSpPr>
+            <a:spLocks noGrp="1"/>
+          </p:cNvSpPr>
+          <p:nvPr>
+            <p:ph idx="1"/>
+          </p:nvPr>
+        </p:nvSpPr>
+        <p:spPr/>
+        <p:txBody>
+          <a:bodyPr/>
+          <a:lstStyle/>
+          <a:p>
+            <a:r>
+              <a:rPr lang="en-US" dirty="0" err="1"/>
+              <a:t>FibroblastGenes</a:t>
+            </a:r>
+            <a:r>
+              <a:rPr lang="en-US" dirty="0"/>
+              <a:t> = ["TGFB1", "PDGFRB", "IL6"];</a:t>
+            </a:r>
+          </a:p>
+          <a:p>
+            <a:r>
+              <a:rPr lang="en-US" dirty="0" err="1"/>
+              <a:t>CancerGenes</a:t>
+            </a:r>
+            <a:r>
+              <a:rPr lang="en-US" dirty="0"/>
+              <a:t> = ["STAT3","IL6RorST","TGFBR1or2","PDGFB"];</a:t>
+            </a:r>
+          </a:p>
+          <a:p>
+            <a:endParaRPr lang="en-US" dirty="0"/>
+          </a:p>
+          <a:p>
+            <a:r>
+              <a:rPr lang="en-US" dirty="0"/>
+              <a:t>7 PDGFB -&gt; 2 PDGFRB</a:t>
+            </a:r>
+          </a:p>
+          <a:p>
+            <a:r>
+              <a:rPr lang="en-US" dirty="0"/>
+              <a:t>1 TGFB1 -&gt;  6 TGFBR1or2</a:t>
+            </a:r>
+          </a:p>
+          <a:p>
+            <a:r>
+              <a:rPr lang="en-US" dirty="0"/>
+              <a:t>3 IL6 -&gt; 5 IL6RorST</a:t>
+            </a:r>
+          </a:p>
+          <a:p>
+            <a:endParaRPr lang="en-US" dirty="0"/>
+          </a:p>
+        </p:txBody>
+      </p:sp>
+    </p:spTree>
+    <p:extLst>
+      <p:ext uri="{BB962C8B-B14F-4D97-AF65-F5344CB8AC3E}">
+        <p14:creationId xmlns:p14="http://schemas.microsoft.com/office/powerpoint/2010/main" val="2421529307"/>
+      </p:ext>
+    </p:extLst>
+  </p:cSld>
+  <p:clrMapOvr>
+    <a:masterClrMapping/>
+  </p:clrMapOvr>
+</p:sld>
+</file>
+
+<file path=ppt/slides/slide3.xml><?xml version="1.0" encoding="utf-8"?>
+<p:sld xmlns:a="http://schemas.openxmlformats.org/drawingml/2006/main" xmlns:r="http://schemas.openxmlformats.org/officeDocument/2006/relationships" xmlns:p="http://schemas.openxmlformats.org/presentationml/2006/main">
+  <p:cSld>
+    <p:spTree>
+      <p:nvGrpSpPr>
+        <p:cNvPr id="1" name=""/>
+        <p:cNvGrpSpPr/>
+        <p:nvPr/>
+      </p:nvGrpSpPr>
+      <p:grpSpPr>
+        <a:xfrm>
+          <a:off x="0" y="0"/>
+          <a:ext cx="0" cy="0"/>
+          <a:chOff x="0" y="0"/>
+          <a:chExt cx="0" cy="0"/>
+        </a:xfrm>
+      </p:grpSpPr>
+      <p:sp>
+        <p:nvSpPr>
+          <p:cNvPr id="2" name="Title 1">
+            <a:extLst>
+              <a:ext uri="{FF2B5EF4-FFF2-40B4-BE49-F238E27FC236}">
+                <a16:creationId xmlns:a16="http://schemas.microsoft.com/office/drawing/2014/main" id="{C48DC0ED-1B47-875C-05C3-2BB80196687A}"/>
+              </a:ext>
+            </a:extLst>
+          </p:cNvPr>
+          <p:cNvSpPr>
+            <a:spLocks noGrp="1"/>
+          </p:cNvSpPr>
+          <p:nvPr>
+            <p:ph type="title"/>
+          </p:nvPr>
+        </p:nvSpPr>
+        <p:spPr/>
+        <p:txBody>
+          <a:bodyPr/>
+          <a:lstStyle/>
+          <a:p>
+            <a:endParaRPr lang="en-US"/>
+          </a:p>
+        </p:txBody>
+      </p:sp>
+      <p:sp>
+        <p:nvSpPr>
+          <p:cNvPr id="3" name="Content Placeholder 2">
+            <a:extLst>
+              <a:ext uri="{FF2B5EF4-FFF2-40B4-BE49-F238E27FC236}">
+                <a16:creationId xmlns:a16="http://schemas.microsoft.com/office/drawing/2014/main" id="{6AD7935E-D2BA-D523-C7AA-8C7AF1229B65}"/>
+              </a:ext>
+            </a:extLst>
+          </p:cNvPr>
+          <p:cNvSpPr>
+            <a:spLocks noGrp="1"/>
+          </p:cNvSpPr>
+          <p:nvPr>
+            <p:ph idx="1"/>
+          </p:nvPr>
+        </p:nvSpPr>
+        <p:spPr/>
+        <p:txBody>
+          <a:bodyPr/>
+          <a:lstStyle/>
+          <a:p>
+            <a:r>
+              <a:rPr lang="en-US" dirty="0"/>
+              <a:t>[7 2; 1 6; 3 5]</a:t>
+            </a:r>
+          </a:p>
+        </p:txBody>
+      </p:sp>
+    </p:spTree>
+    <p:extLst>
+      <p:ext uri="{BB962C8B-B14F-4D97-AF65-F5344CB8AC3E}">
+        <p14:creationId xmlns:p14="http://schemas.microsoft.com/office/powerpoint/2010/main" val="2503160415"/>
+      </p:ext>
+    </p:extLst>
+  </p:cSld>
+  <p:clrMapOvr>
+    <a:masterClrMapping/>
+  </p:clrMapOvr>
+</p:sld>
+</file>
+
 <file path=ppt/theme/theme1.xml><?xml version="1.0" encoding="utf-8"?>
 <a:theme xmlns:a="http://schemas.openxmlformats.org/drawingml/2006/main" name="Office Theme">
   <a:themeElements>

--- a/manuscript/Dataset_8_PDGF_signaling_slows_ovarian_cancer GSM7019822_GSM7019823_GSM7019824/new_analysis/Presentation.pptx
+++ b/manuscript/Dataset_8_PDGF_signaling_slows_ovarian_cancer GSM7019822_GSM7019823_GSM7019824/new_analysis/Presentation.pptx
@@ -3491,6 +3491,18 @@
           <a:p>
             <a:endParaRPr lang="en-US" dirty="0"/>
           </a:p>
+          <a:p>
+            <a:r>
+              <a:rPr lang="en-US"/>
+              <a:t>[7 2; 1 6; 3 5; 5 4]</a:t>
+            </a:r>
+          </a:p>
+          <a:p>
+            <a:endParaRPr lang="en-US" dirty="0"/>
+          </a:p>
+          <a:p>
+            <a:endParaRPr lang="en-US" dirty="0"/>
+          </a:p>
         </p:txBody>
       </p:sp>
     </p:spTree>
@@ -3544,7 +3556,10 @@
           <a:bodyPr/>
           <a:lstStyle/>
           <a:p>
-            <a:endParaRPr lang="en-US"/>
+            <a:r>
+              <a:rPr lang="en-US" dirty="0"/>
+              <a:t>Ideal configuration</a:t>
+            </a:r>
           </a:p>
         </p:txBody>
       </p:sp>
@@ -3571,7 +3586,7 @@
           <a:p>
             <a:r>
               <a:rPr lang="en-US" dirty="0"/>
-              <a:t>[7 2; 1 6; 3 5]</a:t>
+              <a:t>[7 2; 1 6; 3 5; 5 4]</a:t>
             </a:r>
           </a:p>
         </p:txBody>
